--- a/classes/parte-17-profundizacion-para-certificaciones/312-retencion-destruccion-segura-de-datos-y-dlp/clase-312-presentacion.pptx
+++ b/classes/parte-17-profundizacion-para-certificaciones/312-retencion-destruccion-segura-de-datos-y-dlp/clase-312-presentacion.pptx
@@ -17,6 +17,10 @@
     <p:sldId id="265" r:id="rId16"/>
     <p:sldId id="266" r:id="rId17"/>
     <p:sldId id="267" r:id="rId18"/>
+    <p:sldId id="268" r:id="rId19"/>
+    <p:sldId id="269" r:id="rId20"/>
+    <p:sldId id="270" r:id="rId21"/>
+    <p:sldId id="271" r:id="rId22"/>
   </p:sldIdLst>
   <p:sldSz cx="9144000" cy="6858000" type="screen4x3"/>
   <p:notesSz cx="6858000" cy="9144000"/>
@@ -3198,7 +3202,7 @@
                   <a:srgbClr val="0B3D2E"/>
                 </a:solidFill>
               </a:rPr>
-              <a:t>⚠️ Errores comunes</a:t>
+              <a:t>🧪 Laboratorio guiado — Diseñar retención, sanitización y un flujo DLP</a:t>
             </a:r>
           </a:p>
         </p:txBody>
@@ -3236,82 +3240,97 @@
                   <a:srgbClr val="22282E"/>
                 </a:solidFill>
               </a:rPr>
-              <a:t>•  "Formateé el disco, ya está limpio" — El formateo no elimina datos: hay remanencia. Aplica Clear/Purge/Destroy según NIST 800-88.</a:t>
-            </a:r>
-          </a:p>
-          <a:p>
-            <a:pPr>
-              <a:spcAft>
-                <a:spcPts val="600"/>
-              </a:spcAft>
-            </a:pPr>
-            <a:r>
-              <a:rPr sz="1500">
-                <a:solidFill>
-                  <a:srgbClr val="22282E"/>
-                </a:solidFill>
-              </a:rPr>
-              <a:t>•  Sobrescribir un SSD "7 veces" — La FTL deja bloques fuera de alcance. Usa Secure Erase de firmware o criptoborrado.</a:t>
-            </a:r>
-          </a:p>
-          <a:p>
-            <a:pPr>
-              <a:spcAft>
-                <a:spcPts val="600"/>
-              </a:spcAft>
-            </a:pPr>
-            <a:r>
-              <a:rPr sz="1500">
-                <a:solidFill>
-                  <a:srgbClr val="22282E"/>
-                </a:solidFill>
-              </a:rPr>
-              <a:t>•  Retención "para siempre" — Guardar de más aumenta superficie legal y de fuga. Fija plazos y elimina al vencer.</a:t>
-            </a:r>
-          </a:p>
-          <a:p>
-            <a:pPr>
-              <a:spcAft>
-                <a:spcPts val="600"/>
-              </a:spcAft>
-            </a:pPr>
-            <a:r>
-              <a:rPr sz="1500">
-                <a:solidFill>
-                  <a:srgbClr val="22282E"/>
-                </a:solidFill>
-              </a:rPr>
-              <a:t>•  DLP en modo bloqueo total desde el día 1 — Genera falsos positivos y shadow IT. Empieza en modo auditoría y ajusta.</a:t>
-            </a:r>
-          </a:p>
-          <a:p>
-            <a:pPr>
-              <a:spcAft>
-                <a:spcPts val="600"/>
-              </a:spcAft>
-            </a:pPr>
-            <a:r>
-              <a:rPr sz="1500">
-                <a:solidFill>
-                  <a:srgbClr val="22282E"/>
-                </a:solidFill>
-              </a:rPr>
-              <a:t>•  Destruir el medio sin registro — Sin certificado no hay prueba ante auditoría. Emite y archiva el certificado.</a:t>
-            </a:r>
-          </a:p>
-          <a:p>
-            <a:pPr>
-              <a:spcAft>
-                <a:spcPts val="600"/>
-              </a:spcAft>
-            </a:pPr>
-            <a:r>
-              <a:rPr sz="1500">
-                <a:solidFill>
-                  <a:srgbClr val="22282E"/>
-                </a:solidFill>
-              </a:rPr>
-              <a:t>•  Olvidar backups y snapshots — El dato "borrado" sobrevive en réplicas. Incluye copias y nube en el alcance de retención.</a:t>
+              <a:t>•  Continúas con la clínica "NovaSalud" de la clase 311.</a:t>
+            </a:r>
+          </a:p>
+          <a:p>
+            <a:pPr>
+              <a:spcAft>
+                <a:spcPts val="600"/>
+              </a:spcAft>
+            </a:pPr>
+            <a:r>
+              <a:rPr sz="1500">
+                <a:solidFill>
+                  <a:srgbClr val="22282E"/>
+                </a:solidFill>
+              </a:rPr>
+              <a:t>•  Cronograma de retención. Crea una tabla con columnas: Tipo de dato, Base legal,</a:t>
+            </a:r>
+          </a:p>
+          <a:p>
+            <a:pPr>
+              <a:spcAft>
+                <a:spcPts val="600"/>
+              </a:spcAft>
+            </a:pPr>
+            <a:r>
+              <a:rPr sz="1500">
+                <a:solidFill>
+                  <a:srgbClr val="22282E"/>
+                </a:solidFill>
+              </a:rPr>
+              <a:t>•  Período de retención, Acción al vencer, Responsable. Incluye al menos: historia clínica</a:t>
+            </a:r>
+          </a:p>
+          <a:p>
+            <a:pPr>
+              <a:spcAft>
+                <a:spcPts val="600"/>
+              </a:spcAft>
+            </a:pPr>
+            <a:r>
+              <a:rPr sz="1500">
+                <a:solidFill>
+                  <a:srgbClr val="22282E"/>
+                </a:solidFill>
+              </a:rPr>
+              <a:t>•  (según ley sanitaria local), datos de tarjeta (PCI DSS: no almacenar el CVV, minimizar PAN),</a:t>
+            </a:r>
+          </a:p>
+          <a:p>
+            <a:pPr>
+              <a:spcAft>
+                <a:spcPts val="600"/>
+              </a:spcAft>
+            </a:pPr>
+            <a:r>
+              <a:rPr sz="1500">
+                <a:solidFill>
+                  <a:srgbClr val="22282E"/>
+                </a:solidFill>
+              </a:rPr>
+              <a:t>•  logs de seguridad, correos y nómina.</a:t>
+            </a:r>
+          </a:p>
+          <a:p>
+            <a:pPr>
+              <a:spcAft>
+                <a:spcPts val="600"/>
+              </a:spcAft>
+            </a:pPr>
+            <a:r>
+              <a:rPr sz="1500">
+                <a:solidFill>
+                  <a:srgbClr val="22282E"/>
+                </a:solidFill>
+              </a:rPr>
+              <a:t>•  Árbol de decisión de sanitización. Diseña un diagrama: dado (medio + nivel de</a:t>
+            </a:r>
+          </a:p>
+          <a:p>
+            <a:pPr>
+              <a:spcAft>
+                <a:spcPts val="600"/>
+              </a:spcAft>
+            </a:pPr>
+            <a:r>
+              <a:rPr sz="1500">
+                <a:solidFill>
+                  <a:srgbClr val="22282E"/>
+                </a:solidFill>
+              </a:rPr>
+              <a:t>•  clasificación + destino del medio) → elige Clear, Purge o Destroy usando la tabla de NIST 800-88.</a:t>
             </a:r>
           </a:p>
         </p:txBody>
@@ -3362,7 +3381,7 @@
                   <a:srgbClr val="0B3D2E"/>
                 </a:solidFill>
               </a:rPr>
-              <a:t>❓ Preguntas frecuentes</a:t>
+              <a:t>✍️ Ejercicios</a:t>
             </a:r>
           </a:p>
         </p:txBody>
@@ -3400,97 +3419,82 @@
                   <a:srgbClr val="22282E"/>
                 </a:solidFill>
               </a:rPr>
-              <a:t>•  ❓ ¿Cuántas pasadas de sobrescritura necesito en un disco moderno?</a:t>
-            </a:r>
-          </a:p>
-          <a:p>
-            <a:pPr>
-              <a:spcAft>
-                <a:spcPts val="600"/>
-              </a:spcAft>
-            </a:pPr>
-            <a:r>
-              <a:rPr sz="1500">
-                <a:solidFill>
-                  <a:srgbClr val="22282E"/>
-                </a:solidFill>
-              </a:rPr>
-              <a:t>•  En HDD actuales, una sola pasada verificada basta según NIST SP 800-88; el mito de las 7 o 35</a:t>
-            </a:r>
-          </a:p>
-          <a:p>
-            <a:pPr>
-              <a:spcAft>
-                <a:spcPts val="600"/>
-              </a:spcAft>
-            </a:pPr>
-            <a:r>
-              <a:rPr sz="1500">
-                <a:solidFill>
-                  <a:srgbClr val="22282E"/>
-                </a:solidFill>
-              </a:rPr>
-              <a:t>•  pasadas (Gutmann) aplicaba a tecnologías antiguas. En SSD, la sobrescritura no es el método correcto.</a:t>
-            </a:r>
-          </a:p>
-          <a:p>
-            <a:pPr>
-              <a:spcAft>
-                <a:spcPts val="600"/>
-              </a:spcAft>
-            </a:pPr>
-            <a:r>
-              <a:rPr sz="1500">
-                <a:solidFill>
-                  <a:srgbClr val="22282E"/>
-                </a:solidFill>
-              </a:rPr>
-              <a:t>•  ❓ ¿Puedo reutilizar el criptoborrado en la nube?</a:t>
-            </a:r>
-          </a:p>
-          <a:p>
-            <a:pPr>
-              <a:spcAft>
-                <a:spcPts val="600"/>
-              </a:spcAft>
-            </a:pPr>
-            <a:r>
-              <a:rPr sz="1500">
-                <a:solidFill>
-                  <a:srgbClr val="22282E"/>
-                </a:solidFill>
-              </a:rPr>
-              <a:t>•  Sí. Si el proveedor cifra por defecto y tú controlas la clave, destruir la clave (crypto-shred)</a:t>
-            </a:r>
-          </a:p>
-          <a:p>
-            <a:pPr>
-              <a:spcAft>
-                <a:spcPts val="600"/>
-              </a:spcAft>
-            </a:pPr>
-            <a:r>
-              <a:rPr sz="1500">
-                <a:solidFill>
-                  <a:srgbClr val="22282E"/>
-                </a:solidFill>
-              </a:rPr>
-              <a:t>•  inutiliza el dato. Verifica que no queden copias con otras claves (snapshots antiguos).</a:t>
-            </a:r>
-          </a:p>
-          <a:p>
-            <a:pPr>
-              <a:spcAft>
-                <a:spcPts val="600"/>
-              </a:spcAft>
-            </a:pPr>
-            <a:r>
-              <a:rPr sz="1500">
-                <a:solidFill>
-                  <a:srgbClr val="22282E"/>
-                </a:solidFill>
-              </a:rPr>
-              <a:t>•  ❓ ¿DLP reemplaza al cifrado o al control de acceso?</a:t>
+              <a:t>•  Construye un cronograma de retención de 8 tipos de dato con su base legal.</a:t>
+            </a:r>
+          </a:p>
+          <a:p>
+            <a:pPr>
+              <a:spcAft>
+                <a:spcPts val="600"/>
+              </a:spcAft>
+            </a:pPr>
+            <a:r>
+              <a:rPr sz="1500">
+                <a:solidFill>
+                  <a:srgbClr val="22282E"/>
+                </a:solidFill>
+              </a:rPr>
+              <a:t>•  Para 5 escenarios (medio + destino + clasificación), indica Clear/Purge/Destroy y la técnica concreta.</a:t>
+            </a:r>
+          </a:p>
+          <a:p>
+            <a:pPr>
+              <a:spcAft>
+                <a:spcPts val="600"/>
+              </a:spcAft>
+            </a:pPr>
+            <a:r>
+              <a:rPr sz="1500">
+                <a:solidFill>
+                  <a:srgbClr val="22282E"/>
+                </a:solidFill>
+              </a:rPr>
+              <a:t>•  Explica, con la arquitectura flash, por qué el criptoborrado supera a la sobrescritura en SSD.</a:t>
+            </a:r>
+          </a:p>
+          <a:p>
+            <a:pPr>
+              <a:spcAft>
+                <a:spcPts val="600"/>
+              </a:spcAft>
+            </a:pPr>
+            <a:r>
+              <a:rPr sz="1500">
+                <a:solidFill>
+                  <a:srgbClr val="22282E"/>
+                </a:solidFill>
+              </a:rPr>
+              <a:t>•  Diseña 3 reglas DLP (una por estado) con su patrón de detección y su acción.</a:t>
+            </a:r>
+          </a:p>
+          <a:p>
+            <a:pPr>
+              <a:spcAft>
+                <a:spcPts val="600"/>
+              </a:spcAft>
+            </a:pPr>
+            <a:r>
+              <a:rPr sz="1500">
+                <a:solidFill>
+                  <a:srgbClr val="22282E"/>
+                </a:solidFill>
+              </a:rPr>
+              <a:t>•  Redacta el procedimiento de retirada de un servidor: desde la baja lógica hasta el certificado.</a:t>
+            </a:r>
+          </a:p>
+          <a:p>
+            <a:pPr>
+              <a:spcAft>
+                <a:spcPts val="600"/>
+              </a:spcAft>
+            </a:pPr>
+            <a:r>
+              <a:rPr sz="1500">
+                <a:solidFill>
+                  <a:srgbClr val="22282E"/>
+                </a:solidFill>
+              </a:rPr>
+              <a:t>•  Analiza un incidente: una copia de seguridad en la nube conserva datos que se "borraron" en producción. ¿Qué falló y cómo lo corriges?</a:t>
             </a:r>
           </a:p>
         </p:txBody>
@@ -3541,7 +3545,7 @@
                   <a:srgbClr val="0B3D2E"/>
                 </a:solidFill>
               </a:rPr>
-              <a:t>🔗 Referencias</a:t>
+              <a:t>📝 Reto verificable</a:t>
             </a:r>
           </a:p>
         </p:txBody>
@@ -3579,6 +3583,513 @@
                   <a:srgbClr val="22282E"/>
                 </a:solidFill>
               </a:rPr>
+              <a:t>•  Entrega un Procedimiento de Retención y Destrucción Segura que incluya: cronograma de</a:t>
+            </a:r>
+          </a:p>
+          <a:p>
+            <a:pPr>
+              <a:spcAft>
+                <a:spcPts val="600"/>
+              </a:spcAft>
+            </a:pPr>
+            <a:r>
+              <a:rPr sz="1500">
+                <a:solidFill>
+                  <a:srgbClr val="22282E"/>
+                </a:solidFill>
+              </a:rPr>
+              <a:t>•  retención con base legal, árbol de decisión de sanitización basado en NIST 800-88, plantilla de</a:t>
+            </a:r>
+          </a:p>
+          <a:p>
+            <a:pPr>
+              <a:spcAft>
+                <a:spcPts val="600"/>
+              </a:spcAft>
+            </a:pPr>
+            <a:r>
+              <a:rPr sz="1500">
+                <a:solidFill>
+                  <a:srgbClr val="22282E"/>
+                </a:solidFill>
+              </a:rPr>
+              <a:t>•  certificado de destrucción y tres reglas DLP documentadas (reposo/tránsito/uso).</a:t>
+            </a:r>
+          </a:p>
+          <a:p>
+            <a:pPr>
+              <a:spcAft>
+                <a:spcPts val="600"/>
+              </a:spcAft>
+            </a:pPr>
+            <a:r>
+              <a:rPr sz="1500">
+                <a:solidFill>
+                  <a:srgbClr val="22282E"/>
+                </a:solidFill>
+              </a:rPr>
+              <a:t>•  Criterio de aceptación: dado un lote de 4 medios distintos (HDD interno, SSD donado, cinta de</a:t>
+            </a:r>
+          </a:p>
+          <a:p>
+            <a:pPr>
+              <a:spcAft>
+                <a:spcPts val="600"/>
+              </a:spcAft>
+            </a:pPr>
+            <a:r>
+              <a:rPr sz="1500">
+                <a:solidFill>
+                  <a:srgbClr val="22282E"/>
+                </a:solidFill>
+              </a:rPr>
+              <a:t>•  backup, teléfono corporativo) con clasificaciones dadas, tu procedimiento permite a un técnico</a:t>
+            </a:r>
+          </a:p>
+          <a:p>
+            <a:pPr>
+              <a:spcAft>
+                <a:spcPts val="600"/>
+              </a:spcAft>
+            </a:pPr>
+            <a:r>
+              <a:rPr sz="1500">
+                <a:solidFill>
+                  <a:srgbClr val="22282E"/>
+                </a:solidFill>
+              </a:rPr>
+              <a:t>•  elegir el método correcto, ejecutarlo y emitir el certificado sin consultar otra fuente.</a:t>
+            </a:r>
+          </a:p>
+        </p:txBody>
+      </p:sp>
+    </p:spTree>
+  </p:cSld>
+  <p:clrMapOvr>
+    <a:masterClrMapping/>
+  </p:clrMapOvr>
+</p:sld>
+</file>
+
+<file path=ppt/slides/slide13.xml><?xml version="1.0" encoding="utf-8"?>
+<p:sld xmlns:a="http://schemas.openxmlformats.org/drawingml/2006/main" xmlns:p="http://schemas.openxmlformats.org/presentationml/2006/main" xmlns:r="http://schemas.openxmlformats.org/officeDocument/2006/relationships">
+  <p:cSld>
+    <p:spTree>
+      <p:nvGrpSpPr>
+        <p:cNvPr id="1" name=""/>
+        <p:cNvGrpSpPr/>
+        <p:nvPr/>
+      </p:nvGrpSpPr>
+      <p:grpSpPr/>
+      <p:sp>
+        <p:nvSpPr>
+          <p:cNvPr id="2" name="TextBox 1"/>
+          <p:cNvSpPr txBox="1"/>
+          <p:nvPr/>
+        </p:nvSpPr>
+        <p:spPr>
+          <a:xfrm>
+            <a:off x="457200" y="320040"/>
+            <a:ext cx="8229600" cy="822960"/>
+          </a:xfrm>
+          <a:prstGeom prst="rect">
+            <a:avLst/>
+          </a:prstGeom>
+          <a:noFill/>
+        </p:spPr>
+        <p:txBody>
+          <a:bodyPr wrap="square">
+            <a:spAutoFit/>
+          </a:bodyPr>
+          <a:lstStyle/>
+          <a:p>
+            <a:r>
+              <a:rPr sz="2600" b="1">
+                <a:solidFill>
+                  <a:srgbClr val="0B3D2E"/>
+                </a:solidFill>
+              </a:rPr>
+              <a:t>⚠️ Errores comunes</a:t>
+            </a:r>
+          </a:p>
+        </p:txBody>
+      </p:sp>
+      <p:sp>
+        <p:nvSpPr>
+          <p:cNvPr id="3" name="TextBox 2"/>
+          <p:cNvSpPr txBox="1"/>
+          <p:nvPr/>
+        </p:nvSpPr>
+        <p:spPr>
+          <a:xfrm>
+            <a:off x="457200" y="1280160"/>
+            <a:ext cx="8229600" cy="4937760"/>
+          </a:xfrm>
+          <a:prstGeom prst="rect">
+            <a:avLst/>
+          </a:prstGeom>
+          <a:noFill/>
+        </p:spPr>
+        <p:txBody>
+          <a:bodyPr wrap="square">
+            <a:spAutoFit/>
+          </a:bodyPr>
+          <a:lstStyle/>
+          <a:p>
+            <a:pPr>
+              <a:spcAft>
+                <a:spcPts val="600"/>
+              </a:spcAft>
+            </a:pPr>
+            <a:r>
+              <a:rPr sz="1500">
+                <a:solidFill>
+                  <a:srgbClr val="22282E"/>
+                </a:solidFill>
+              </a:rPr>
+              <a:t>•  "Formateé el disco, ya está limpio" — El formateo no elimina datos: hay remanencia. Aplica Clear/Purge/Destroy según NIST 800-88.</a:t>
+            </a:r>
+          </a:p>
+          <a:p>
+            <a:pPr>
+              <a:spcAft>
+                <a:spcPts val="600"/>
+              </a:spcAft>
+            </a:pPr>
+            <a:r>
+              <a:rPr sz="1500">
+                <a:solidFill>
+                  <a:srgbClr val="22282E"/>
+                </a:solidFill>
+              </a:rPr>
+              <a:t>•  Sobrescribir un SSD "7 veces" — La FTL deja bloques fuera de alcance. Usa Secure Erase de firmware o criptoborrado.</a:t>
+            </a:r>
+          </a:p>
+          <a:p>
+            <a:pPr>
+              <a:spcAft>
+                <a:spcPts val="600"/>
+              </a:spcAft>
+            </a:pPr>
+            <a:r>
+              <a:rPr sz="1500">
+                <a:solidFill>
+                  <a:srgbClr val="22282E"/>
+                </a:solidFill>
+              </a:rPr>
+              <a:t>•  Retención "para siempre" — Guardar de más aumenta superficie legal y de fuga. Fija plazos y elimina al vencer.</a:t>
+            </a:r>
+          </a:p>
+          <a:p>
+            <a:pPr>
+              <a:spcAft>
+                <a:spcPts val="600"/>
+              </a:spcAft>
+            </a:pPr>
+            <a:r>
+              <a:rPr sz="1500">
+                <a:solidFill>
+                  <a:srgbClr val="22282E"/>
+                </a:solidFill>
+              </a:rPr>
+              <a:t>•  DLP en modo bloqueo total desde el día 1 — Genera falsos positivos y shadow IT. Empieza en modo auditoría y ajusta.</a:t>
+            </a:r>
+          </a:p>
+          <a:p>
+            <a:pPr>
+              <a:spcAft>
+                <a:spcPts val="600"/>
+              </a:spcAft>
+            </a:pPr>
+            <a:r>
+              <a:rPr sz="1500">
+                <a:solidFill>
+                  <a:srgbClr val="22282E"/>
+                </a:solidFill>
+              </a:rPr>
+              <a:t>•  Destruir el medio sin registro — Sin certificado no hay prueba ante auditoría. Emite y archiva el certificado.</a:t>
+            </a:r>
+          </a:p>
+          <a:p>
+            <a:pPr>
+              <a:spcAft>
+                <a:spcPts val="600"/>
+              </a:spcAft>
+            </a:pPr>
+            <a:r>
+              <a:rPr sz="1500">
+                <a:solidFill>
+                  <a:srgbClr val="22282E"/>
+                </a:solidFill>
+              </a:rPr>
+              <a:t>•  Olvidar backups y snapshots — El dato "borrado" sobrevive en réplicas. Incluye copias y nube en el alcance de retención.</a:t>
+            </a:r>
+          </a:p>
+        </p:txBody>
+      </p:sp>
+    </p:spTree>
+  </p:cSld>
+  <p:clrMapOvr>
+    <a:masterClrMapping/>
+  </p:clrMapOvr>
+</p:sld>
+</file>
+
+<file path=ppt/slides/slide14.xml><?xml version="1.0" encoding="utf-8"?>
+<p:sld xmlns:a="http://schemas.openxmlformats.org/drawingml/2006/main" xmlns:p="http://schemas.openxmlformats.org/presentationml/2006/main" xmlns:r="http://schemas.openxmlformats.org/officeDocument/2006/relationships">
+  <p:cSld>
+    <p:spTree>
+      <p:nvGrpSpPr>
+        <p:cNvPr id="1" name=""/>
+        <p:cNvGrpSpPr/>
+        <p:nvPr/>
+      </p:nvGrpSpPr>
+      <p:grpSpPr/>
+      <p:sp>
+        <p:nvSpPr>
+          <p:cNvPr id="2" name="TextBox 1"/>
+          <p:cNvSpPr txBox="1"/>
+          <p:nvPr/>
+        </p:nvSpPr>
+        <p:spPr>
+          <a:xfrm>
+            <a:off x="457200" y="320040"/>
+            <a:ext cx="8229600" cy="822960"/>
+          </a:xfrm>
+          <a:prstGeom prst="rect">
+            <a:avLst/>
+          </a:prstGeom>
+          <a:noFill/>
+        </p:spPr>
+        <p:txBody>
+          <a:bodyPr wrap="square">
+            <a:spAutoFit/>
+          </a:bodyPr>
+          <a:lstStyle/>
+          <a:p>
+            <a:r>
+              <a:rPr sz="2600" b="1">
+                <a:solidFill>
+                  <a:srgbClr val="0B3D2E"/>
+                </a:solidFill>
+              </a:rPr>
+              <a:t>❓ Preguntas frecuentes</a:t>
+            </a:r>
+          </a:p>
+        </p:txBody>
+      </p:sp>
+      <p:sp>
+        <p:nvSpPr>
+          <p:cNvPr id="3" name="TextBox 2"/>
+          <p:cNvSpPr txBox="1"/>
+          <p:nvPr/>
+        </p:nvSpPr>
+        <p:spPr>
+          <a:xfrm>
+            <a:off x="457200" y="1280160"/>
+            <a:ext cx="8229600" cy="4937760"/>
+          </a:xfrm>
+          <a:prstGeom prst="rect">
+            <a:avLst/>
+          </a:prstGeom>
+          <a:noFill/>
+        </p:spPr>
+        <p:txBody>
+          <a:bodyPr wrap="square">
+            <a:spAutoFit/>
+          </a:bodyPr>
+          <a:lstStyle/>
+          <a:p>
+            <a:pPr>
+              <a:spcAft>
+                <a:spcPts val="600"/>
+              </a:spcAft>
+            </a:pPr>
+            <a:r>
+              <a:rPr sz="1500">
+                <a:solidFill>
+                  <a:srgbClr val="22282E"/>
+                </a:solidFill>
+              </a:rPr>
+              <a:t>•  ❓ ¿Cuántas pasadas de sobrescritura necesito en un disco moderno?</a:t>
+            </a:r>
+          </a:p>
+          <a:p>
+            <a:pPr>
+              <a:spcAft>
+                <a:spcPts val="600"/>
+              </a:spcAft>
+            </a:pPr>
+            <a:r>
+              <a:rPr sz="1500">
+                <a:solidFill>
+                  <a:srgbClr val="22282E"/>
+                </a:solidFill>
+              </a:rPr>
+              <a:t>•  En HDD actuales, una sola pasada verificada basta según NIST SP 800-88; el mito de las 7 o 35</a:t>
+            </a:r>
+          </a:p>
+          <a:p>
+            <a:pPr>
+              <a:spcAft>
+                <a:spcPts val="600"/>
+              </a:spcAft>
+            </a:pPr>
+            <a:r>
+              <a:rPr sz="1500">
+                <a:solidFill>
+                  <a:srgbClr val="22282E"/>
+                </a:solidFill>
+              </a:rPr>
+              <a:t>•  pasadas (Gutmann) aplicaba a tecnologías antiguas. En SSD, la sobrescritura no es el método correcto.</a:t>
+            </a:r>
+          </a:p>
+          <a:p>
+            <a:pPr>
+              <a:spcAft>
+                <a:spcPts val="600"/>
+              </a:spcAft>
+            </a:pPr>
+            <a:r>
+              <a:rPr sz="1500">
+                <a:solidFill>
+                  <a:srgbClr val="22282E"/>
+                </a:solidFill>
+              </a:rPr>
+              <a:t>•  ❓ ¿Puedo reutilizar el criptoborrado en la nube?</a:t>
+            </a:r>
+          </a:p>
+          <a:p>
+            <a:pPr>
+              <a:spcAft>
+                <a:spcPts val="600"/>
+              </a:spcAft>
+            </a:pPr>
+            <a:r>
+              <a:rPr sz="1500">
+                <a:solidFill>
+                  <a:srgbClr val="22282E"/>
+                </a:solidFill>
+              </a:rPr>
+              <a:t>•  Sí. Si el proveedor cifra por defecto y tú controlas la clave, destruir la clave (crypto-shred)</a:t>
+            </a:r>
+          </a:p>
+          <a:p>
+            <a:pPr>
+              <a:spcAft>
+                <a:spcPts val="600"/>
+              </a:spcAft>
+            </a:pPr>
+            <a:r>
+              <a:rPr sz="1500">
+                <a:solidFill>
+                  <a:srgbClr val="22282E"/>
+                </a:solidFill>
+              </a:rPr>
+              <a:t>•  inutiliza el dato. Verifica que no queden copias con otras claves (snapshots antiguos).</a:t>
+            </a:r>
+          </a:p>
+          <a:p>
+            <a:pPr>
+              <a:spcAft>
+                <a:spcPts val="600"/>
+              </a:spcAft>
+            </a:pPr>
+            <a:r>
+              <a:rPr sz="1500">
+                <a:solidFill>
+                  <a:srgbClr val="22282E"/>
+                </a:solidFill>
+              </a:rPr>
+              <a:t>•  ❓ ¿DLP reemplaza al cifrado o al control de acceso?</a:t>
+            </a:r>
+          </a:p>
+        </p:txBody>
+      </p:sp>
+    </p:spTree>
+  </p:cSld>
+  <p:clrMapOvr>
+    <a:masterClrMapping/>
+  </p:clrMapOvr>
+</p:sld>
+</file>
+
+<file path=ppt/slides/slide15.xml><?xml version="1.0" encoding="utf-8"?>
+<p:sld xmlns:a="http://schemas.openxmlformats.org/drawingml/2006/main" xmlns:p="http://schemas.openxmlformats.org/presentationml/2006/main" xmlns:r="http://schemas.openxmlformats.org/officeDocument/2006/relationships">
+  <p:cSld>
+    <p:spTree>
+      <p:nvGrpSpPr>
+        <p:cNvPr id="1" name=""/>
+        <p:cNvGrpSpPr/>
+        <p:nvPr/>
+      </p:nvGrpSpPr>
+      <p:grpSpPr/>
+      <p:sp>
+        <p:nvSpPr>
+          <p:cNvPr id="2" name="TextBox 1"/>
+          <p:cNvSpPr txBox="1"/>
+          <p:nvPr/>
+        </p:nvSpPr>
+        <p:spPr>
+          <a:xfrm>
+            <a:off x="457200" y="320040"/>
+            <a:ext cx="8229600" cy="822960"/>
+          </a:xfrm>
+          <a:prstGeom prst="rect">
+            <a:avLst/>
+          </a:prstGeom>
+          <a:noFill/>
+        </p:spPr>
+        <p:txBody>
+          <a:bodyPr wrap="square">
+            <a:spAutoFit/>
+          </a:bodyPr>
+          <a:lstStyle/>
+          <a:p>
+            <a:r>
+              <a:rPr sz="2600" b="1">
+                <a:solidFill>
+                  <a:srgbClr val="0B3D2E"/>
+                </a:solidFill>
+              </a:rPr>
+              <a:t>🔗 Referencias</a:t>
+            </a:r>
+          </a:p>
+        </p:txBody>
+      </p:sp>
+      <p:sp>
+        <p:nvSpPr>
+          <p:cNvPr id="3" name="TextBox 2"/>
+          <p:cNvSpPr txBox="1"/>
+          <p:nvPr/>
+        </p:nvSpPr>
+        <p:spPr>
+          <a:xfrm>
+            <a:off x="457200" y="1280160"/>
+            <a:ext cx="8229600" cy="4937760"/>
+          </a:xfrm>
+          <a:prstGeom prst="rect">
+            <a:avLst/>
+          </a:prstGeom>
+          <a:noFill/>
+        </p:spPr>
+        <p:txBody>
+          <a:bodyPr wrap="square">
+            <a:spAutoFit/>
+          </a:bodyPr>
+          <a:lstStyle/>
+          <a:p>
+            <a:pPr>
+              <a:spcAft>
+                <a:spcPts val="600"/>
+              </a:spcAft>
+            </a:pPr>
+            <a:r>
+              <a:rPr sz="1500">
+                <a:solidFill>
+                  <a:srgbClr val="22282E"/>
+                </a:solidFill>
+              </a:rPr>
               <a:t>•  NIST SP 800-88 Rev. 1 — Guidelines for Media Sanitization. &lt;https://csrc.nist.gov/pubs/sp/800/88/r1/final&gt;</a:t>
             </a:r>
           </a:p>
@@ -3644,6 +4155,81 @@
           </a:p>
         </p:txBody>
       </p:sp>
+    </p:spTree>
+  </p:cSld>
+  <p:clrMapOvr>
+    <a:masterClrMapping/>
+  </p:clrMapOvr>
+</p:sld>
+</file>
+
+<file path=ppt/slides/slide16.xml><?xml version="1.0" encoding="utf-8"?>
+<p:sld xmlns:a="http://schemas.openxmlformats.org/drawingml/2006/main" xmlns:p="http://schemas.openxmlformats.org/presentationml/2006/main" xmlns:r="http://schemas.openxmlformats.org/officeDocument/2006/relationships">
+  <p:cSld>
+    <p:spTree>
+      <p:nvGrpSpPr>
+        <p:cNvPr id="1" name=""/>
+        <p:cNvGrpSpPr/>
+        <p:nvPr/>
+      </p:nvGrpSpPr>
+      <p:grpSpPr/>
+      <p:sp>
+        <p:nvSpPr>
+          <p:cNvPr id="2" name="TextBox 1"/>
+          <p:cNvSpPr txBox="1"/>
+          <p:nvPr/>
+        </p:nvSpPr>
+        <p:spPr>
+          <a:xfrm>
+            <a:off x="457200" y="274320"/>
+            <a:ext cx="8229600" cy="640080"/>
+          </a:xfrm>
+          <a:prstGeom prst="rect">
+            <a:avLst/>
+          </a:prstGeom>
+          <a:noFill/>
+        </p:spPr>
+        <p:txBody>
+          <a:bodyPr wrap="square">
+            <a:spAutoFit/>
+          </a:bodyPr>
+          <a:lstStyle/>
+          <a:p>
+            <a:r>
+              <a:rPr sz="2200" b="1">
+                <a:solidFill>
+                  <a:srgbClr val="0B3D2E"/>
+                </a:solidFill>
+              </a:rPr>
+              <a:t>Diagrama de la clase</a:t>
+            </a:r>
+          </a:p>
+        </p:txBody>
+      </p:sp>
+      <p:pic>
+        <p:nvPicPr>
+          <p:cNvPr id="3" name="Picture 2" descr="d523967468e02499.png"/>
+          <p:cNvPicPr>
+            <a:picLocks noChangeAspect="1"/>
+          </p:cNvPicPr>
+          <p:nvPr/>
+        </p:nvPicPr>
+        <p:blipFill>
+          <a:blip r:embed="rId2"/>
+          <a:stretch>
+            <a:fillRect/>
+          </a:stretch>
+        </p:blipFill>
+        <p:spPr>
+          <a:xfrm>
+            <a:off x="457200" y="3338147"/>
+            <a:ext cx="8229600" cy="821786"/>
+          </a:xfrm>
+          <a:prstGeom prst="rect">
+            <a:avLst/>
+          </a:prstGeom>
+        </p:spPr>
+      </p:pic>
     </p:spTree>
   </p:cSld>
   <p:clrMapOvr>
@@ -4197,7 +4783,7 @@
                   <a:srgbClr val="0B3D2E"/>
                 </a:solidFill>
               </a:rPr>
-              <a:t>📖 Definiciones y características</a:t>
+              <a:t>🧠 Modelo mental y caso de decisión</a:t>
             </a:r>
           </a:p>
         </p:txBody>
@@ -4235,97 +4821,22 @@
                   <a:srgbClr val="22282E"/>
                 </a:solidFill>
               </a:rPr>
-              <a:t>•  Retención de datos: período durante el cual la organización conserva un tipo de dato,</a:t>
-            </a:r>
-          </a:p>
-          <a:p>
-            <a:pPr>
-              <a:spcAft>
-                <a:spcPts val="600"/>
-              </a:spcAft>
-            </a:pPr>
-            <a:r>
-              <a:rPr sz="1500">
-                <a:solidFill>
-                  <a:srgbClr val="22282E"/>
-                </a:solidFill>
-              </a:rPr>
-              <a:t>•  fijado por ley, contrato o necesidad de negocio. Característica: define también la</a:t>
-            </a:r>
-          </a:p>
-          <a:p>
-            <a:pPr>
-              <a:spcAft>
-                <a:spcPts val="600"/>
-              </a:spcAft>
-            </a:pPr>
-            <a:r>
-              <a:rPr sz="1500">
-                <a:solidFill>
-                  <a:srgbClr val="22282E"/>
-                </a:solidFill>
-              </a:rPr>
-              <a:t>•  eliminación obligatoria al vencer el plazo.</a:t>
-            </a:r>
-          </a:p>
-          <a:p>
-            <a:pPr>
-              <a:spcAft>
-                <a:spcPts val="600"/>
-              </a:spcAft>
-            </a:pPr>
-            <a:r>
-              <a:rPr sz="1500">
-                <a:solidFill>
-                  <a:srgbClr val="22282E"/>
-                </a:solidFill>
-              </a:rPr>
-              <a:t>•  Data remanence: información residual que persiste tras un borrado aparente. Es la razón</a:t>
-            </a:r>
-          </a:p>
-          <a:p>
-            <a:pPr>
-              <a:spcAft>
-                <a:spcPts val="600"/>
-              </a:spcAft>
-            </a:pPr>
-            <a:r>
-              <a:rPr sz="1500">
-                <a:solidFill>
-                  <a:srgbClr val="22282E"/>
-                </a:solidFill>
-              </a:rPr>
-              <a:t>•  por la que "vaciar la papelera" o formatear no equivale a sanitizar.</a:t>
-            </a:r>
-          </a:p>
-          <a:p>
-            <a:pPr>
-              <a:spcAft>
-                <a:spcPts val="600"/>
-              </a:spcAft>
-            </a:pPr>
-            <a:r>
-              <a:rPr sz="1500">
-                <a:solidFill>
-                  <a:srgbClr val="22282E"/>
-                </a:solidFill>
-              </a:rPr>
-              <a:t>•  Clear (limpiar): técnicas lógicas (sobrescritura, reset) que impiden la recuperación con</a:t>
-            </a:r>
-          </a:p>
-          <a:p>
-            <a:pPr>
-              <a:spcAft>
-                <a:spcPts val="600"/>
-              </a:spcAft>
-            </a:pPr>
-            <a:r>
-              <a:rPr sz="1500">
-                <a:solidFill>
-                  <a:srgbClr val="22282E"/>
-                </a:solidFill>
-              </a:rPr>
-              <a:t>•  herramientas estándar. Adecuado para reutilización interna, impacto bajo.</a:t>
+              <a:t>•  Retención equilibra obligación, necesidad y minimización; DLP observa canales pero no comprende por sí solo propósito.</a:t>
+            </a:r>
+          </a:p>
+          <a:p>
+            <a:pPr>
+              <a:spcAft>
+                <a:spcPts val="600"/>
+              </a:spcAft>
+            </a:pPr>
+            <a:r>
+              <a:rPr sz="1500">
+                <a:solidFill>
+                  <a:srgbClr val="22282E"/>
+                </a:solidFill>
+              </a:rPr>
+              <a:t>•  Caso razonado. Un backup impide cumplir eliminación inmediata; se documenta expiración y acceso restringido en vez de prometer borrado inexistente.</a:t>
             </a:r>
           </a:p>
         </p:txBody>
@@ -4376,7 +4887,7 @@
                   <a:srgbClr val="0B3D2E"/>
                 </a:solidFill>
               </a:rPr>
-              <a:t>🧰 Herramientas y preparación</a:t>
+              <a:t>📔 Glosario operativo complementario</a:t>
             </a:r>
           </a:p>
         </p:txBody>
@@ -4414,97 +4925,52 @@
                   <a:srgbClr val="22282E"/>
                 </a:solidFill>
               </a:rPr>
-              <a:t>•  NIST SP 800-88 Rev. 1 y su Apéndice A (tabla de sanitización por medio) como referencia guía.</a:t>
-            </a:r>
-          </a:p>
-          <a:p>
-            <a:pPr>
-              <a:spcAft>
-                <a:spcPts val="600"/>
-              </a:spcAft>
-            </a:pPr>
-            <a:r>
-              <a:rPr sz="1500">
-                <a:solidFill>
-                  <a:srgbClr val="22282E"/>
-                </a:solidFill>
-              </a:rPr>
-              <a:t>•  Utilidades de sanitización (solo sobre medios propios de prueba): hdparm --security-erase</a:t>
-            </a:r>
-          </a:p>
-          <a:p>
-            <a:pPr>
-              <a:spcAft>
-                <a:spcPts val="600"/>
-              </a:spcAft>
-            </a:pPr>
-            <a:r>
-              <a:rPr sz="1500">
-                <a:solidFill>
-                  <a:srgbClr val="22282E"/>
-                </a:solidFill>
-              </a:rPr>
-              <a:t>•  (ATA Secure Erase en Linux), blkdiscard (TRIM en SSD), nvme format (NVMe), la utilidad de</a:t>
-            </a:r>
-          </a:p>
-          <a:p>
-            <a:pPr>
-              <a:spcAft>
-                <a:spcPts val="600"/>
-              </a:spcAft>
-            </a:pPr>
-            <a:r>
-              <a:rPr sz="1500">
-                <a:solidFill>
-                  <a:srgbClr val="22282E"/>
-                </a:solidFill>
-              </a:rPr>
-              <a:t>•  desmagnetización del fabricante. Nunca las ejecutes sobre datos que no quieras perder.</a:t>
-            </a:r>
-          </a:p>
-          <a:p>
-            <a:pPr>
-              <a:spcAft>
-                <a:spcPts val="600"/>
-              </a:spcAft>
-            </a:pPr>
-            <a:r>
-              <a:rPr sz="1500">
-                <a:solidFill>
-                  <a:srgbClr val="22282E"/>
-                </a:solidFill>
-              </a:rPr>
-              <a:t>•  Para el ejercicio de DLP: una consola de referencia (Microsoft Purview DLP, Forcepoint o el</a:t>
-            </a:r>
-          </a:p>
-          <a:p>
-            <a:pPr>
-              <a:spcAft>
-                <a:spcPts val="600"/>
-              </a:spcAft>
-            </a:pPr>
-            <a:r>
-              <a:rPr sz="1500">
-                <a:solidFill>
-                  <a:srgbClr val="22282E"/>
-                </a:solidFill>
-              </a:rPr>
-              <a:t>•  concepto de reglas por patrón, p. ej. expresiones regulares para tarjetas de pago).</a:t>
-            </a:r>
-          </a:p>
-          <a:p>
-            <a:pPr>
-              <a:spcAft>
-                <a:spcPts val="600"/>
-              </a:spcAft>
-            </a:pPr>
-            <a:r>
-              <a:rPr sz="1500">
-                <a:solidFill>
-                  <a:srgbClr val="22282E"/>
-                </a:solidFill>
-              </a:rPr>
-              <a:t>•  Hoja de cálculo para el cronograma de retención y el registro de destrucción.</a:t>
+              <a:t>•  Término — Definición</a:t>
+            </a:r>
+          </a:p>
+          <a:p>
+            <a:pPr>
+              <a:spcAft>
+                <a:spcPts val="600"/>
+              </a:spcAft>
+            </a:pPr>
+            <a:r>
+              <a:rPr sz="1500">
+                <a:solidFill>
+                  <a:srgbClr val="22282E"/>
+                </a:solidFill>
+              </a:rPr>
+              <a:t>•  Evidencia — Información cuya procedencia y relación con un criterio pueden revisarse.</a:t>
+            </a:r>
+          </a:p>
+          <a:p>
+            <a:pPr>
+              <a:spcAft>
+                <a:spcPts val="600"/>
+              </a:spcAft>
+            </a:pPr>
+            <a:r>
+              <a:rPr sz="1500">
+                <a:solidFill>
+                  <a:srgbClr val="22282E"/>
+                </a:solidFill>
+              </a:rPr>
+              <a:t>•  Supuesto — Condición declarada de la que depende una conclusión.</a:t>
+            </a:r>
+          </a:p>
+          <a:p>
+            <a:pPr>
+              <a:spcAft>
+                <a:spcPts val="600"/>
+              </a:spcAft>
+            </a:pPr>
+            <a:r>
+              <a:rPr sz="1500">
+                <a:solidFill>
+                  <a:srgbClr val="22282E"/>
+                </a:solidFill>
+              </a:rPr>
+              <a:t>•  Riesgo residual — Exposición que permanece después del tratamiento.</a:t>
             </a:r>
           </a:p>
         </p:txBody>
@@ -4555,7 +5021,7 @@
                   <a:srgbClr val="0B3D2E"/>
                 </a:solidFill>
               </a:rPr>
-              <a:t>🧪 Laboratorio guiado — Diseñar retención, sanitización y un flujo DLP</a:t>
+              <a:t>✅ Criterio de dominio</a:t>
             </a:r>
           </a:p>
         </p:txBody>
@@ -4593,97 +5059,7 @@
                   <a:srgbClr val="22282E"/>
                 </a:solidFill>
               </a:rPr>
-              <a:t>•  Continúas con la clínica "NovaSalud" de la clase 311.</a:t>
-            </a:r>
-          </a:p>
-          <a:p>
-            <a:pPr>
-              <a:spcAft>
-                <a:spcPts val="600"/>
-              </a:spcAft>
-            </a:pPr>
-            <a:r>
-              <a:rPr sz="1500">
-                <a:solidFill>
-                  <a:srgbClr val="22282E"/>
-                </a:solidFill>
-              </a:rPr>
-              <a:t>•  Cronograma de retención. Crea una tabla con columnas: Tipo de dato, Base legal,</a:t>
-            </a:r>
-          </a:p>
-          <a:p>
-            <a:pPr>
-              <a:spcAft>
-                <a:spcPts val="600"/>
-              </a:spcAft>
-            </a:pPr>
-            <a:r>
-              <a:rPr sz="1500">
-                <a:solidFill>
-                  <a:srgbClr val="22282E"/>
-                </a:solidFill>
-              </a:rPr>
-              <a:t>•  Período de retención, Acción al vencer, Responsable. Incluye al menos: historia clínica</a:t>
-            </a:r>
-          </a:p>
-          <a:p>
-            <a:pPr>
-              <a:spcAft>
-                <a:spcPts val="600"/>
-              </a:spcAft>
-            </a:pPr>
-            <a:r>
-              <a:rPr sz="1500">
-                <a:solidFill>
-                  <a:srgbClr val="22282E"/>
-                </a:solidFill>
-              </a:rPr>
-              <a:t>•  (según ley sanitaria local), datos de tarjeta (PCI DSS: no almacenar el CVV, minimizar PAN),</a:t>
-            </a:r>
-          </a:p>
-          <a:p>
-            <a:pPr>
-              <a:spcAft>
-                <a:spcPts val="600"/>
-              </a:spcAft>
-            </a:pPr>
-            <a:r>
-              <a:rPr sz="1500">
-                <a:solidFill>
-                  <a:srgbClr val="22282E"/>
-                </a:solidFill>
-              </a:rPr>
-              <a:t>•  logs de seguridad, correos y nómina.</a:t>
-            </a:r>
-          </a:p>
-          <a:p>
-            <a:pPr>
-              <a:spcAft>
-                <a:spcPts val="600"/>
-              </a:spcAft>
-            </a:pPr>
-            <a:r>
-              <a:rPr sz="1500">
-                <a:solidFill>
-                  <a:srgbClr val="22282E"/>
-                </a:solidFill>
-              </a:rPr>
-              <a:t>•  Árbol de decisión de sanitización. Diseña un diagrama: dado (medio + nivel de</a:t>
-            </a:r>
-          </a:p>
-          <a:p>
-            <a:pPr>
-              <a:spcAft>
-                <a:spcPts val="600"/>
-              </a:spcAft>
-            </a:pPr>
-            <a:r>
-              <a:rPr sz="1500">
-                <a:solidFill>
-                  <a:srgbClr val="22282E"/>
-                </a:solidFill>
-              </a:rPr>
-              <a:t>•  clasificación + destino del medio) → elige Clear, Purge o Destroy usando la tabla de NIST 800-88.</a:t>
+              <a:t>•  El alumno demuestra dominio cuando explica el diagrama, resuelve el caso con evidencia, declara límites y puede defender por qué su decisión cambia si cambia un supuesto.</a:t>
             </a:r>
           </a:p>
         </p:txBody>
@@ -4734,7 +5110,7 @@
                   <a:srgbClr val="0B3D2E"/>
                 </a:solidFill>
               </a:rPr>
-              <a:t>✍️ Ejercicios</a:t>
+              <a:t>📖 Definiciones y características</a:t>
             </a:r>
           </a:p>
         </p:txBody>
@@ -4772,82 +5148,97 @@
                   <a:srgbClr val="22282E"/>
                 </a:solidFill>
               </a:rPr>
-              <a:t>•  Construye un cronograma de retención de 8 tipos de dato con su base legal.</a:t>
-            </a:r>
-          </a:p>
-          <a:p>
-            <a:pPr>
-              <a:spcAft>
-                <a:spcPts val="600"/>
-              </a:spcAft>
-            </a:pPr>
-            <a:r>
-              <a:rPr sz="1500">
-                <a:solidFill>
-                  <a:srgbClr val="22282E"/>
-                </a:solidFill>
-              </a:rPr>
-              <a:t>•  Para 5 escenarios (medio + destino + clasificación), indica Clear/Purge/Destroy y la técnica concreta.</a:t>
-            </a:r>
-          </a:p>
-          <a:p>
-            <a:pPr>
-              <a:spcAft>
-                <a:spcPts val="600"/>
-              </a:spcAft>
-            </a:pPr>
-            <a:r>
-              <a:rPr sz="1500">
-                <a:solidFill>
-                  <a:srgbClr val="22282E"/>
-                </a:solidFill>
-              </a:rPr>
-              <a:t>•  Explica, con la arquitectura flash, por qué el criptoborrado supera a la sobrescritura en SSD.</a:t>
-            </a:r>
-          </a:p>
-          <a:p>
-            <a:pPr>
-              <a:spcAft>
-                <a:spcPts val="600"/>
-              </a:spcAft>
-            </a:pPr>
-            <a:r>
-              <a:rPr sz="1500">
-                <a:solidFill>
-                  <a:srgbClr val="22282E"/>
-                </a:solidFill>
-              </a:rPr>
-              <a:t>•  Diseña 3 reglas DLP (una por estado) con su patrón de detección y su acción.</a:t>
-            </a:r>
-          </a:p>
-          <a:p>
-            <a:pPr>
-              <a:spcAft>
-                <a:spcPts val="600"/>
-              </a:spcAft>
-            </a:pPr>
-            <a:r>
-              <a:rPr sz="1500">
-                <a:solidFill>
-                  <a:srgbClr val="22282E"/>
-                </a:solidFill>
-              </a:rPr>
-              <a:t>•  Redacta el procedimiento de retirada de un servidor: desde la baja lógica hasta el certificado.</a:t>
-            </a:r>
-          </a:p>
-          <a:p>
-            <a:pPr>
-              <a:spcAft>
-                <a:spcPts val="600"/>
-              </a:spcAft>
-            </a:pPr>
-            <a:r>
-              <a:rPr sz="1500">
-                <a:solidFill>
-                  <a:srgbClr val="22282E"/>
-                </a:solidFill>
-              </a:rPr>
-              <a:t>•  Analiza un incidente: una copia de seguridad en la nube conserva datos que se "borraron" en producción. ¿Qué falló y cómo lo corriges?</a:t>
+              <a:t>•  Retención de datos: período durante el cual la organización conserva un tipo de dato,</a:t>
+            </a:r>
+          </a:p>
+          <a:p>
+            <a:pPr>
+              <a:spcAft>
+                <a:spcPts val="600"/>
+              </a:spcAft>
+            </a:pPr>
+            <a:r>
+              <a:rPr sz="1500">
+                <a:solidFill>
+                  <a:srgbClr val="22282E"/>
+                </a:solidFill>
+              </a:rPr>
+              <a:t>•  fijado por ley, contrato o necesidad de negocio. Característica: define también la</a:t>
+            </a:r>
+          </a:p>
+          <a:p>
+            <a:pPr>
+              <a:spcAft>
+                <a:spcPts val="600"/>
+              </a:spcAft>
+            </a:pPr>
+            <a:r>
+              <a:rPr sz="1500">
+                <a:solidFill>
+                  <a:srgbClr val="22282E"/>
+                </a:solidFill>
+              </a:rPr>
+              <a:t>•  eliminación obligatoria al vencer el plazo.</a:t>
+            </a:r>
+          </a:p>
+          <a:p>
+            <a:pPr>
+              <a:spcAft>
+                <a:spcPts val="600"/>
+              </a:spcAft>
+            </a:pPr>
+            <a:r>
+              <a:rPr sz="1500">
+                <a:solidFill>
+                  <a:srgbClr val="22282E"/>
+                </a:solidFill>
+              </a:rPr>
+              <a:t>•  Data remanence: información residual que persiste tras un borrado aparente. Es la razón</a:t>
+            </a:r>
+          </a:p>
+          <a:p>
+            <a:pPr>
+              <a:spcAft>
+                <a:spcPts val="600"/>
+              </a:spcAft>
+            </a:pPr>
+            <a:r>
+              <a:rPr sz="1500">
+                <a:solidFill>
+                  <a:srgbClr val="22282E"/>
+                </a:solidFill>
+              </a:rPr>
+              <a:t>•  por la que "vaciar la papelera" o formatear no equivale a sanitizar.</a:t>
+            </a:r>
+          </a:p>
+          <a:p>
+            <a:pPr>
+              <a:spcAft>
+                <a:spcPts val="600"/>
+              </a:spcAft>
+            </a:pPr>
+            <a:r>
+              <a:rPr sz="1500">
+                <a:solidFill>
+                  <a:srgbClr val="22282E"/>
+                </a:solidFill>
+              </a:rPr>
+              <a:t>•  Clear (limpiar): técnicas lógicas (sobrescritura, reset) que impiden la recuperación con</a:t>
+            </a:r>
+          </a:p>
+          <a:p>
+            <a:pPr>
+              <a:spcAft>
+                <a:spcPts val="600"/>
+              </a:spcAft>
+            </a:pPr>
+            <a:r>
+              <a:rPr sz="1500">
+                <a:solidFill>
+                  <a:srgbClr val="22282E"/>
+                </a:solidFill>
+              </a:rPr>
+              <a:t>•  herramientas estándar. Adecuado para reutilización interna, impacto bajo.</a:t>
             </a:r>
           </a:p>
         </p:txBody>
@@ -4898,7 +5289,7 @@
                   <a:srgbClr val="0B3D2E"/>
                 </a:solidFill>
               </a:rPr>
-              <a:t>📝 Reto verificable</a:t>
+              <a:t>🧰 Herramientas y preparación</a:t>
             </a:r>
           </a:p>
         </p:txBody>
@@ -4936,82 +5327,97 @@
                   <a:srgbClr val="22282E"/>
                 </a:solidFill>
               </a:rPr>
-              <a:t>•  Entrega un Procedimiento de Retención y Destrucción Segura que incluya: cronograma de</a:t>
-            </a:r>
-          </a:p>
-          <a:p>
-            <a:pPr>
-              <a:spcAft>
-                <a:spcPts val="600"/>
-              </a:spcAft>
-            </a:pPr>
-            <a:r>
-              <a:rPr sz="1500">
-                <a:solidFill>
-                  <a:srgbClr val="22282E"/>
-                </a:solidFill>
-              </a:rPr>
-              <a:t>•  retención con base legal, árbol de decisión de sanitización basado en NIST 800-88, plantilla de</a:t>
-            </a:r>
-          </a:p>
-          <a:p>
-            <a:pPr>
-              <a:spcAft>
-                <a:spcPts val="600"/>
-              </a:spcAft>
-            </a:pPr>
-            <a:r>
-              <a:rPr sz="1500">
-                <a:solidFill>
-                  <a:srgbClr val="22282E"/>
-                </a:solidFill>
-              </a:rPr>
-              <a:t>•  certificado de destrucción y tres reglas DLP documentadas (reposo/tránsito/uso).</a:t>
-            </a:r>
-          </a:p>
-          <a:p>
-            <a:pPr>
-              <a:spcAft>
-                <a:spcPts val="600"/>
-              </a:spcAft>
-            </a:pPr>
-            <a:r>
-              <a:rPr sz="1500">
-                <a:solidFill>
-                  <a:srgbClr val="22282E"/>
-                </a:solidFill>
-              </a:rPr>
-              <a:t>•  Criterio de aceptación: dado un lote de 4 medios distintos (HDD interno, SSD donado, cinta de</a:t>
-            </a:r>
-          </a:p>
-          <a:p>
-            <a:pPr>
-              <a:spcAft>
-                <a:spcPts val="600"/>
-              </a:spcAft>
-            </a:pPr>
-            <a:r>
-              <a:rPr sz="1500">
-                <a:solidFill>
-                  <a:srgbClr val="22282E"/>
-                </a:solidFill>
-              </a:rPr>
-              <a:t>•  backup, teléfono corporativo) con clasificaciones dadas, tu procedimiento permite a un técnico</a:t>
-            </a:r>
-          </a:p>
-          <a:p>
-            <a:pPr>
-              <a:spcAft>
-                <a:spcPts val="600"/>
-              </a:spcAft>
-            </a:pPr>
-            <a:r>
-              <a:rPr sz="1500">
-                <a:solidFill>
-                  <a:srgbClr val="22282E"/>
-                </a:solidFill>
-              </a:rPr>
-              <a:t>•  elegir el método correcto, ejecutarlo y emitir el certificado sin consultar otra fuente.</a:t>
+              <a:t>•  NIST SP 800-88 Rev. 1 y su Apéndice A (tabla de sanitización por medio) como referencia guía.</a:t>
+            </a:r>
+          </a:p>
+          <a:p>
+            <a:pPr>
+              <a:spcAft>
+                <a:spcPts val="600"/>
+              </a:spcAft>
+            </a:pPr>
+            <a:r>
+              <a:rPr sz="1500">
+                <a:solidFill>
+                  <a:srgbClr val="22282E"/>
+                </a:solidFill>
+              </a:rPr>
+              <a:t>•  Utilidades de sanitización (solo sobre medios propios de prueba): hdparm --security-erase</a:t>
+            </a:r>
+          </a:p>
+          <a:p>
+            <a:pPr>
+              <a:spcAft>
+                <a:spcPts val="600"/>
+              </a:spcAft>
+            </a:pPr>
+            <a:r>
+              <a:rPr sz="1500">
+                <a:solidFill>
+                  <a:srgbClr val="22282E"/>
+                </a:solidFill>
+              </a:rPr>
+              <a:t>•  (ATA Secure Erase en Linux), blkdiscard (TRIM en SSD), nvme format (NVMe), la utilidad de</a:t>
+            </a:r>
+          </a:p>
+          <a:p>
+            <a:pPr>
+              <a:spcAft>
+                <a:spcPts val="600"/>
+              </a:spcAft>
+            </a:pPr>
+            <a:r>
+              <a:rPr sz="1500">
+                <a:solidFill>
+                  <a:srgbClr val="22282E"/>
+                </a:solidFill>
+              </a:rPr>
+              <a:t>•  desmagnetización del fabricante. Nunca las ejecutes sobre datos que no quieras perder.</a:t>
+            </a:r>
+          </a:p>
+          <a:p>
+            <a:pPr>
+              <a:spcAft>
+                <a:spcPts val="600"/>
+              </a:spcAft>
+            </a:pPr>
+            <a:r>
+              <a:rPr sz="1500">
+                <a:solidFill>
+                  <a:srgbClr val="22282E"/>
+                </a:solidFill>
+              </a:rPr>
+              <a:t>•  Para el ejercicio de DLP: una consola de referencia (Microsoft Purview DLP, Forcepoint o el</a:t>
+            </a:r>
+          </a:p>
+          <a:p>
+            <a:pPr>
+              <a:spcAft>
+                <a:spcPts val="600"/>
+              </a:spcAft>
+            </a:pPr>
+            <a:r>
+              <a:rPr sz="1500">
+                <a:solidFill>
+                  <a:srgbClr val="22282E"/>
+                </a:solidFill>
+              </a:rPr>
+              <a:t>•  concepto de reglas por patrón, p. ej. expresiones regulares para tarjetas de pago).</a:t>
+            </a:r>
+          </a:p>
+          <a:p>
+            <a:pPr>
+              <a:spcAft>
+                <a:spcPts val="600"/>
+              </a:spcAft>
+            </a:pPr>
+            <a:r>
+              <a:rPr sz="1500">
+                <a:solidFill>
+                  <a:srgbClr val="22282E"/>
+                </a:solidFill>
+              </a:rPr>
+              <a:t>•  Hoja de cálculo para el cronograma de retención y el registro de destrucción.</a:t>
             </a:r>
           </a:p>
         </p:txBody>
